--- a/גלילה.pptx
+++ b/גלילה.pptx
@@ -12,6 +12,7 @@
     <p:sldId id="261" r:id="rId6"/>
     <p:sldId id="262" r:id="rId7"/>
     <p:sldId id="263" r:id="rId8"/>
+    <p:sldId id="264" r:id="rId9"/>
   </p:sldIdLst>
   <p:sldSz cx="12192000" cy="6858000"/>
   <p:notesSz cx="6858000" cy="9144000"/>
@@ -110,6 +111,11 @@
       </a:defRPr>
     </a:lvl9pPr>
   </p:defaultTextStyle>
+  <p:extLst>
+    <p:ext uri="{EFAFB233-063F-42B5-8137-9DF3F51BA10A}">
+      <p15:sldGuideLst xmlns:p15="http://schemas.microsoft.com/office/powerpoint/2012/main"/>
+    </p:ext>
+  </p:extLst>
 </p:presentation>
 </file>
 
@@ -260,7 +266,7 @@
           <a:p>
             <a:fld id="{50DA568D-9A1C-48B4-A69C-074C3172A689}" type="datetimeFigureOut">
               <a:rPr lang="he-IL" smtClean="0"/>
-              <a:t>כ"ו/טבת/תשפ"ו</a:t>
+              <a:t>כ"א/אדר/תשפ"ו</a:t>
             </a:fld>
             <a:endParaRPr lang="he-IL"/>
           </a:p>
@@ -458,7 +464,7 @@
           <a:p>
             <a:fld id="{50DA568D-9A1C-48B4-A69C-074C3172A689}" type="datetimeFigureOut">
               <a:rPr lang="he-IL" smtClean="0"/>
-              <a:t>כ"ו/טבת/תשפ"ו</a:t>
+              <a:t>כ"א/אדר/תשפ"ו</a:t>
             </a:fld>
             <a:endParaRPr lang="he-IL"/>
           </a:p>
@@ -666,7 +672,7 @@
           <a:p>
             <a:fld id="{50DA568D-9A1C-48B4-A69C-074C3172A689}" type="datetimeFigureOut">
               <a:rPr lang="he-IL" smtClean="0"/>
-              <a:t>כ"ו/טבת/תשפ"ו</a:t>
+              <a:t>כ"א/אדר/תשפ"ו</a:t>
             </a:fld>
             <a:endParaRPr lang="he-IL"/>
           </a:p>
@@ -864,7 +870,7 @@
           <a:p>
             <a:fld id="{50DA568D-9A1C-48B4-A69C-074C3172A689}" type="datetimeFigureOut">
               <a:rPr lang="he-IL" smtClean="0"/>
-              <a:t>כ"ו/טבת/תשפ"ו</a:t>
+              <a:t>כ"א/אדר/תשפ"ו</a:t>
             </a:fld>
             <a:endParaRPr lang="he-IL"/>
           </a:p>
@@ -1139,7 +1145,7 @@
           <a:p>
             <a:fld id="{50DA568D-9A1C-48B4-A69C-074C3172A689}" type="datetimeFigureOut">
               <a:rPr lang="he-IL" smtClean="0"/>
-              <a:t>כ"ו/טבת/תשפ"ו</a:t>
+              <a:t>כ"א/אדר/תשפ"ו</a:t>
             </a:fld>
             <a:endParaRPr lang="he-IL"/>
           </a:p>
@@ -1404,7 +1410,7 @@
           <a:p>
             <a:fld id="{50DA568D-9A1C-48B4-A69C-074C3172A689}" type="datetimeFigureOut">
               <a:rPr lang="he-IL" smtClean="0"/>
-              <a:t>כ"ו/טבת/תשפ"ו</a:t>
+              <a:t>כ"א/אדר/תשפ"ו</a:t>
             </a:fld>
             <a:endParaRPr lang="he-IL"/>
           </a:p>
@@ -1816,7 +1822,7 @@
           <a:p>
             <a:fld id="{50DA568D-9A1C-48B4-A69C-074C3172A689}" type="datetimeFigureOut">
               <a:rPr lang="he-IL" smtClean="0"/>
-              <a:t>כ"ו/טבת/תשפ"ו</a:t>
+              <a:t>כ"א/אדר/תשפ"ו</a:t>
             </a:fld>
             <a:endParaRPr lang="he-IL"/>
           </a:p>
@@ -1957,7 +1963,7 @@
           <a:p>
             <a:fld id="{50DA568D-9A1C-48B4-A69C-074C3172A689}" type="datetimeFigureOut">
               <a:rPr lang="he-IL" smtClean="0"/>
-              <a:t>כ"ו/טבת/תשפ"ו</a:t>
+              <a:t>כ"א/אדר/תשפ"ו</a:t>
             </a:fld>
             <a:endParaRPr lang="he-IL"/>
           </a:p>
@@ -2070,7 +2076,7 @@
           <a:p>
             <a:fld id="{50DA568D-9A1C-48B4-A69C-074C3172A689}" type="datetimeFigureOut">
               <a:rPr lang="he-IL" smtClean="0"/>
-              <a:t>כ"ו/טבת/תשפ"ו</a:t>
+              <a:t>כ"א/אדר/תשפ"ו</a:t>
             </a:fld>
             <a:endParaRPr lang="he-IL"/>
           </a:p>
@@ -2381,7 +2387,7 @@
           <a:p>
             <a:fld id="{50DA568D-9A1C-48B4-A69C-074C3172A689}" type="datetimeFigureOut">
               <a:rPr lang="he-IL" smtClean="0"/>
-              <a:t>כ"ו/טבת/תשפ"ו</a:t>
+              <a:t>כ"א/אדר/תשפ"ו</a:t>
             </a:fld>
             <a:endParaRPr lang="he-IL"/>
           </a:p>
@@ -2669,7 +2675,7 @@
           <a:p>
             <a:fld id="{50DA568D-9A1C-48B4-A69C-074C3172A689}" type="datetimeFigureOut">
               <a:rPr lang="he-IL" smtClean="0"/>
-              <a:t>כ"ו/טבת/תשפ"ו</a:t>
+              <a:t>כ"א/אדר/תשפ"ו</a:t>
             </a:fld>
             <a:endParaRPr lang="he-IL"/>
           </a:p>
@@ -2910,7 +2916,7 @@
           <a:p>
             <a:fld id="{50DA568D-9A1C-48B4-A69C-074C3172A689}" type="datetimeFigureOut">
               <a:rPr lang="he-IL" smtClean="0"/>
-              <a:t>כ"ו/טבת/תשפ"ו</a:t>
+              <a:t>כ"א/אדר/תשפ"ו</a:t>
             </a:fld>
             <a:endParaRPr lang="he-IL"/>
           </a:p>
@@ -8989,6 +8995,1711 @@
     <p:extLst>
       <p:ext uri="{BB962C8B-B14F-4D97-AF65-F5344CB8AC3E}">
         <p14:creationId xmlns:p14="http://schemas.microsoft.com/office/powerpoint/2010/main" val="488115362"/>
+      </p:ext>
+    </p:extLst>
+  </p:cSld>
+  <p:clrMapOvr>
+    <a:masterClrMapping/>
+  </p:clrMapOvr>
+</p:sld>
+</file>
+
+<file path=ppt/slides/slide8.xml><?xml version="1.0" encoding="utf-8"?>
+<p:sld xmlns:a="http://schemas.openxmlformats.org/drawingml/2006/main" xmlns:r="http://schemas.openxmlformats.org/officeDocument/2006/relationships" xmlns:p="http://schemas.openxmlformats.org/presentationml/2006/main">
+  <p:cSld>
+    <p:spTree>
+      <p:nvGrpSpPr>
+        <p:cNvPr id="1" name="">
+          <a:extLst>
+            <a:ext uri="{FF2B5EF4-FFF2-40B4-BE49-F238E27FC236}">
+              <a16:creationId xmlns:a16="http://schemas.microsoft.com/office/drawing/2014/main" id="{FC630D8B-4BB3-0D5F-4E08-473D637E24A0}"/>
+            </a:ext>
+          </a:extLst>
+        </p:cNvPr>
+        <p:cNvGrpSpPr/>
+        <p:nvPr/>
+      </p:nvGrpSpPr>
+      <p:grpSpPr>
+        <a:xfrm>
+          <a:off x="0" y="0"/>
+          <a:ext cx="0" cy="0"/>
+          <a:chOff x="0" y="0"/>
+          <a:chExt cx="0" cy="0"/>
+        </a:xfrm>
+      </p:grpSpPr>
+      <p:sp>
+        <p:nvSpPr>
+          <p:cNvPr id="4" name="מלבן 3">
+            <a:extLst>
+              <a:ext uri="{FF2B5EF4-FFF2-40B4-BE49-F238E27FC236}">
+                <a16:creationId xmlns:a16="http://schemas.microsoft.com/office/drawing/2014/main" id="{BAC2CF02-07DB-56A8-6A05-33EDF7E793D6}"/>
+              </a:ext>
+            </a:extLst>
+          </p:cNvPr>
+          <p:cNvSpPr/>
+          <p:nvPr/>
+        </p:nvSpPr>
+        <p:spPr>
+          <a:xfrm>
+            <a:off x="3414409" y="272374"/>
+            <a:ext cx="4659549" cy="6313251"/>
+          </a:xfrm>
+          <a:prstGeom prst="rect">
+            <a:avLst/>
+          </a:prstGeom>
+          <a:solidFill>
+            <a:schemeClr val="bg1">
+              <a:lumMod val="65000"/>
+            </a:schemeClr>
+          </a:solidFill>
+        </p:spPr>
+        <p:style>
+          <a:lnRef idx="2">
+            <a:schemeClr val="accent1">
+              <a:shade val="15000"/>
+            </a:schemeClr>
+          </a:lnRef>
+          <a:fillRef idx="1">
+            <a:schemeClr val="accent1"/>
+          </a:fillRef>
+          <a:effectRef idx="0">
+            <a:schemeClr val="accent1"/>
+          </a:effectRef>
+          <a:fontRef idx="minor">
+            <a:schemeClr val="lt1"/>
+          </a:fontRef>
+        </p:style>
+        <p:txBody>
+          <a:bodyPr rtlCol="1" anchor="ctr"/>
+          <a:lstStyle/>
+          <a:p>
+            <a:pPr algn="ctr"/>
+            <a:endParaRPr lang="he-IL"/>
+          </a:p>
+        </p:txBody>
+      </p:sp>
+      <p:sp>
+        <p:nvSpPr>
+          <p:cNvPr id="5" name="תיבת טקסט 4">
+            <a:extLst>
+              <a:ext uri="{FF2B5EF4-FFF2-40B4-BE49-F238E27FC236}">
+                <a16:creationId xmlns:a16="http://schemas.microsoft.com/office/drawing/2014/main" id="{01A2AC73-02E5-8056-376C-A5F1341AC29F}"/>
+              </a:ext>
+            </a:extLst>
+          </p:cNvPr>
+          <p:cNvSpPr txBox="1"/>
+          <p:nvPr/>
+        </p:nvSpPr>
+        <p:spPr>
+          <a:xfrm>
+            <a:off x="10807430" y="87708"/>
+            <a:ext cx="943583" cy="369332"/>
+          </a:xfrm>
+          <a:prstGeom prst="rect">
+            <a:avLst/>
+          </a:prstGeom>
+          <a:noFill/>
+        </p:spPr>
+        <p:txBody>
+          <a:bodyPr wrap="square" rtlCol="1">
+            <a:spAutoFit/>
+          </a:bodyPr>
+          <a:lstStyle/>
+          <a:p>
+            <a:r>
+              <a:rPr lang="he-IL" dirty="0"/>
+              <a:t>שקף 7</a:t>
+            </a:r>
+          </a:p>
+        </p:txBody>
+      </p:sp>
+      <p:sp>
+        <p:nvSpPr>
+          <p:cNvPr id="2" name="תיבת טקסט 1">
+            <a:extLst>
+              <a:ext uri="{FF2B5EF4-FFF2-40B4-BE49-F238E27FC236}">
+                <a16:creationId xmlns:a16="http://schemas.microsoft.com/office/drawing/2014/main" id="{65EF9BEF-4E3A-847E-3ECE-93DC18227AFE}"/>
+              </a:ext>
+            </a:extLst>
+          </p:cNvPr>
+          <p:cNvSpPr txBox="1"/>
+          <p:nvPr/>
+        </p:nvSpPr>
+        <p:spPr>
+          <a:xfrm>
+            <a:off x="8910538" y="544908"/>
+            <a:ext cx="2743200" cy="369332"/>
+          </a:xfrm>
+          <a:prstGeom prst="rect">
+            <a:avLst/>
+          </a:prstGeom>
+          <a:noFill/>
+        </p:spPr>
+        <p:txBody>
+          <a:bodyPr wrap="square" rtlCol="1">
+            <a:spAutoFit/>
+          </a:bodyPr>
+          <a:lstStyle/>
+          <a:p>
+            <a:r>
+              <a:rPr lang="he-IL" dirty="0"/>
+              <a:t>המשתמש חוזר למצרכים</a:t>
+            </a:r>
+          </a:p>
+        </p:txBody>
+      </p:sp>
+      <p:sp>
+        <p:nvSpPr>
+          <p:cNvPr id="10" name="תיבת טקסט 9">
+            <a:extLst>
+              <a:ext uri="{FF2B5EF4-FFF2-40B4-BE49-F238E27FC236}">
+                <a16:creationId xmlns:a16="http://schemas.microsoft.com/office/drawing/2014/main" id="{C8FCEC1F-9F98-11B7-18D0-122225458EBA}"/>
+              </a:ext>
+            </a:extLst>
+          </p:cNvPr>
+          <p:cNvSpPr txBox="1"/>
+          <p:nvPr/>
+        </p:nvSpPr>
+        <p:spPr>
+          <a:xfrm>
+            <a:off x="8910538" y="1002108"/>
+            <a:ext cx="2743200" cy="1477328"/>
+          </a:xfrm>
+          <a:prstGeom prst="rect">
+            <a:avLst/>
+          </a:prstGeom>
+          <a:noFill/>
+        </p:spPr>
+        <p:txBody>
+          <a:bodyPr wrap="square" rtlCol="1">
+            <a:spAutoFit/>
+          </a:bodyPr>
+          <a:lstStyle/>
+          <a:p>
+            <a:r>
+              <a:rPr lang="he-IL" dirty="0"/>
+              <a:t>כאן תשים לב איך זה ניראה</a:t>
+            </a:r>
+          </a:p>
+          <a:p>
+            <a:r>
+              <a:rPr lang="he-IL" dirty="0"/>
+              <a:t>זה מראה את הכפתורים במקום האחרון שהם היו.</a:t>
+            </a:r>
+            <a:br>
+              <a:rPr lang="en-US" dirty="0"/>
+            </a:br>
+            <a:r>
+              <a:rPr lang="he-IL" dirty="0"/>
+              <a:t>ומראה את המצרכים במצרך האחרון שהוצג.</a:t>
+            </a:r>
+          </a:p>
+        </p:txBody>
+      </p:sp>
+      <p:graphicFrame>
+        <p:nvGraphicFramePr>
+          <p:cNvPr id="14" name="טבלה 13">
+            <a:extLst>
+              <a:ext uri="{FF2B5EF4-FFF2-40B4-BE49-F238E27FC236}">
+                <a16:creationId xmlns:a16="http://schemas.microsoft.com/office/drawing/2014/main" id="{A81D9190-410F-0A15-443E-04378F36B85E}"/>
+              </a:ext>
+            </a:extLst>
+          </p:cNvPr>
+          <p:cNvGraphicFramePr>
+            <a:graphicFrameLocks noGrp="1"/>
+          </p:cNvGraphicFramePr>
+          <p:nvPr>
+            <p:extLst>
+              <p:ext uri="{D42A27DB-BD31-4B8C-83A1-F6EECF244321}">
+                <p14:modId xmlns:p14="http://schemas.microsoft.com/office/powerpoint/2010/main" val="1258779880"/>
+              </p:ext>
+            </p:extLst>
+          </p:nvPr>
+        </p:nvGraphicFramePr>
+        <p:xfrm>
+          <a:off x="3910519" y="1130022"/>
+          <a:ext cx="3852154" cy="370840"/>
+        </p:xfrm>
+        <a:graphic>
+          <a:graphicData uri="http://schemas.openxmlformats.org/drawingml/2006/table">
+            <a:tbl>
+              <a:tblPr rtl="1" firstRow="1" bandRow="1">
+                <a:tableStyleId>{21E4AEA4-8DFA-4A89-87EB-49C32662AFE0}</a:tableStyleId>
+              </a:tblPr>
+              <a:tblGrid>
+                <a:gridCol w="3852154">
+                  <a:extLst>
+                    <a:ext uri="{9D8B030D-6E8A-4147-A177-3AD203B41FA5}">
+                      <a16:colId xmlns:a16="http://schemas.microsoft.com/office/drawing/2014/main" val="4096975194"/>
+                    </a:ext>
+                  </a:extLst>
+                </a:gridCol>
+              </a:tblGrid>
+              <a:tr h="370840">
+                <a:tc>
+                  <a:txBody>
+                    <a:bodyPr/>
+                    <a:lstStyle/>
+                    <a:p>
+                      <a:pPr algn="ctr" rtl="1"/>
+                      <a:r>
+                        <a:rPr lang="he-IL" dirty="0"/>
+                        <a:t>רשימה המתעדכנת כל יום</a:t>
+                      </a:r>
+                    </a:p>
+                  </a:txBody>
+                  <a:tcPr/>
+                </a:tc>
+                <a:extLst>
+                  <a:ext uri="{0D108BD9-81ED-4DB2-BD59-A6C34878D82A}">
+                    <a16:rowId xmlns:a16="http://schemas.microsoft.com/office/drawing/2014/main" val="1408062758"/>
+                  </a:ext>
+                </a:extLst>
+              </a:tr>
+            </a:tbl>
+          </a:graphicData>
+        </a:graphic>
+      </p:graphicFrame>
+      <p:sp>
+        <p:nvSpPr>
+          <p:cNvPr id="15" name="מלבן 14">
+            <a:extLst>
+              <a:ext uri="{FF2B5EF4-FFF2-40B4-BE49-F238E27FC236}">
+                <a16:creationId xmlns:a16="http://schemas.microsoft.com/office/drawing/2014/main" id="{CDD45BE2-C044-7898-5CF9-DD0D786BEAFC}"/>
+              </a:ext>
+            </a:extLst>
+          </p:cNvPr>
+          <p:cNvSpPr/>
+          <p:nvPr/>
+        </p:nvSpPr>
+        <p:spPr>
+          <a:xfrm>
+            <a:off x="7217924" y="2745910"/>
+            <a:ext cx="428017" cy="300367"/>
+          </a:xfrm>
+          <a:prstGeom prst="rect">
+            <a:avLst/>
+          </a:prstGeom>
+        </p:spPr>
+        <p:style>
+          <a:lnRef idx="2">
+            <a:schemeClr val="accent1">
+              <a:shade val="15000"/>
+            </a:schemeClr>
+          </a:lnRef>
+          <a:fillRef idx="1">
+            <a:schemeClr val="accent1"/>
+          </a:fillRef>
+          <a:effectRef idx="0">
+            <a:schemeClr val="accent1"/>
+          </a:effectRef>
+          <a:fontRef idx="minor">
+            <a:schemeClr val="lt1"/>
+          </a:fontRef>
+        </p:style>
+        <p:txBody>
+          <a:bodyPr rtlCol="1" anchor="ctr"/>
+          <a:lstStyle/>
+          <a:p>
+            <a:pPr algn="ctr" rtl="0"/>
+            <a:endParaRPr lang="he-IL" dirty="0"/>
+          </a:p>
+        </p:txBody>
+      </p:sp>
+      <p:sp>
+        <p:nvSpPr>
+          <p:cNvPr id="16" name="תיבת טקסט 15">
+            <a:extLst>
+              <a:ext uri="{FF2B5EF4-FFF2-40B4-BE49-F238E27FC236}">
+                <a16:creationId xmlns:a16="http://schemas.microsoft.com/office/drawing/2014/main" id="{9451C4E6-DACC-C705-A68D-7CDB38E4CD31}"/>
+              </a:ext>
+            </a:extLst>
+          </p:cNvPr>
+          <p:cNvSpPr txBox="1"/>
+          <p:nvPr/>
+        </p:nvSpPr>
+        <p:spPr>
+          <a:xfrm>
+            <a:off x="5398853" y="2688243"/>
+            <a:ext cx="1640732" cy="369332"/>
+          </a:xfrm>
+          <a:prstGeom prst="rect">
+            <a:avLst/>
+          </a:prstGeom>
+          <a:noFill/>
+        </p:spPr>
+        <p:txBody>
+          <a:bodyPr wrap="square" rtlCol="1">
+            <a:spAutoFit/>
+          </a:bodyPr>
+          <a:lstStyle/>
+          <a:p>
+            <a:r>
+              <a:rPr lang="he-IL" dirty="0"/>
+              <a:t>מצרך ארבע</a:t>
+            </a:r>
+          </a:p>
+        </p:txBody>
+      </p:sp>
+      <p:sp>
+        <p:nvSpPr>
+          <p:cNvPr id="17" name="מלבן 16">
+            <a:extLst>
+              <a:ext uri="{FF2B5EF4-FFF2-40B4-BE49-F238E27FC236}">
+                <a16:creationId xmlns:a16="http://schemas.microsoft.com/office/drawing/2014/main" id="{8B8BA28C-DF50-AF3E-E0CC-6A28355B8357}"/>
+              </a:ext>
+            </a:extLst>
+          </p:cNvPr>
+          <p:cNvSpPr/>
+          <p:nvPr/>
+        </p:nvSpPr>
+        <p:spPr>
+          <a:xfrm>
+            <a:off x="7217924" y="3300767"/>
+            <a:ext cx="428017" cy="300367"/>
+          </a:xfrm>
+          <a:prstGeom prst="rect">
+            <a:avLst/>
+          </a:prstGeom>
+        </p:spPr>
+        <p:style>
+          <a:lnRef idx="2">
+            <a:schemeClr val="accent1">
+              <a:shade val="15000"/>
+            </a:schemeClr>
+          </a:lnRef>
+          <a:fillRef idx="1">
+            <a:schemeClr val="accent1"/>
+          </a:fillRef>
+          <a:effectRef idx="0">
+            <a:schemeClr val="accent1"/>
+          </a:effectRef>
+          <a:fontRef idx="minor">
+            <a:schemeClr val="lt1"/>
+          </a:fontRef>
+        </p:style>
+        <p:txBody>
+          <a:bodyPr rtlCol="1" anchor="ctr"/>
+          <a:lstStyle/>
+          <a:p>
+            <a:pPr algn="ctr" rtl="0"/>
+            <a:endParaRPr lang="he-IL" dirty="0"/>
+          </a:p>
+        </p:txBody>
+      </p:sp>
+      <p:sp>
+        <p:nvSpPr>
+          <p:cNvPr id="18" name="תיבת טקסט 17">
+            <a:extLst>
+              <a:ext uri="{FF2B5EF4-FFF2-40B4-BE49-F238E27FC236}">
+                <a16:creationId xmlns:a16="http://schemas.microsoft.com/office/drawing/2014/main" id="{8468F626-FFA3-C0D8-0661-3610917499C5}"/>
+              </a:ext>
+            </a:extLst>
+          </p:cNvPr>
+          <p:cNvSpPr txBox="1"/>
+          <p:nvPr/>
+        </p:nvSpPr>
+        <p:spPr>
+          <a:xfrm>
+            <a:off x="5398853" y="3266284"/>
+            <a:ext cx="1640732" cy="369332"/>
+          </a:xfrm>
+          <a:prstGeom prst="rect">
+            <a:avLst/>
+          </a:prstGeom>
+          <a:noFill/>
+        </p:spPr>
+        <p:txBody>
+          <a:bodyPr wrap="square" rtlCol="1">
+            <a:spAutoFit/>
+          </a:bodyPr>
+          <a:lstStyle/>
+          <a:p>
+            <a:r>
+              <a:rPr lang="he-IL" dirty="0"/>
+              <a:t>מצרך חמש</a:t>
+            </a:r>
+          </a:p>
+        </p:txBody>
+      </p:sp>
+      <p:sp>
+        <p:nvSpPr>
+          <p:cNvPr id="11" name="תיבת טקסט 10">
+            <a:extLst>
+              <a:ext uri="{FF2B5EF4-FFF2-40B4-BE49-F238E27FC236}">
+                <a16:creationId xmlns:a16="http://schemas.microsoft.com/office/drawing/2014/main" id="{EC299A03-1277-D85C-59F9-31898E7006D5}"/>
+              </a:ext>
+            </a:extLst>
+          </p:cNvPr>
+          <p:cNvSpPr txBox="1"/>
+          <p:nvPr/>
+        </p:nvSpPr>
+        <p:spPr>
+          <a:xfrm>
+            <a:off x="3747581" y="1740772"/>
+            <a:ext cx="2173325" cy="369332"/>
+          </a:xfrm>
+          <a:prstGeom prst="rect">
+            <a:avLst/>
+          </a:prstGeom>
+          <a:noFill/>
+        </p:spPr>
+        <p:txBody>
+          <a:bodyPr wrap="square">
+            <a:spAutoFit/>
+          </a:bodyPr>
+          <a:lstStyle/>
+          <a:p>
+            <a:r>
+              <a:rPr lang="he-IL" dirty="0"/>
+              <a:t>הגדר את טווח הקניות </a:t>
+            </a:r>
+          </a:p>
+        </p:txBody>
+      </p:sp>
+      <p:sp>
+        <p:nvSpPr>
+          <p:cNvPr id="12" name="תיבת טקסט 11">
+            <a:extLst>
+              <a:ext uri="{FF2B5EF4-FFF2-40B4-BE49-F238E27FC236}">
+                <a16:creationId xmlns:a16="http://schemas.microsoft.com/office/drawing/2014/main" id="{CEBA0D18-9838-5798-B2A6-0415CBF6CB85}"/>
+              </a:ext>
+            </a:extLst>
+          </p:cNvPr>
+          <p:cNvSpPr txBox="1"/>
+          <p:nvPr/>
+        </p:nvSpPr>
+        <p:spPr>
+          <a:xfrm>
+            <a:off x="6479838" y="380787"/>
+            <a:ext cx="1476172" cy="369332"/>
+          </a:xfrm>
+          <a:prstGeom prst="rect">
+            <a:avLst/>
+          </a:prstGeom>
+          <a:noFill/>
+        </p:spPr>
+        <p:txBody>
+          <a:bodyPr wrap="square">
+            <a:spAutoFit/>
+          </a:bodyPr>
+          <a:lstStyle/>
+          <a:p>
+            <a:pPr algn="l" rtl="0"/>
+            <a:r>
+              <a:rPr lang="he-IL" dirty="0"/>
+              <a:t>רשימת קניות</a:t>
+            </a:r>
+          </a:p>
+        </p:txBody>
+      </p:sp>
+      <p:sp>
+        <p:nvSpPr>
+          <p:cNvPr id="28" name="אליפסה 27">
+            <a:extLst>
+              <a:ext uri="{FF2B5EF4-FFF2-40B4-BE49-F238E27FC236}">
+                <a16:creationId xmlns:a16="http://schemas.microsoft.com/office/drawing/2014/main" id="{0DE8AD4C-3D11-A5BC-E7B2-33D6AB5A75FC}"/>
+              </a:ext>
+            </a:extLst>
+          </p:cNvPr>
+          <p:cNvSpPr/>
+          <p:nvPr/>
+        </p:nvSpPr>
+        <p:spPr>
+          <a:xfrm>
+            <a:off x="3618689" y="457040"/>
+            <a:ext cx="45719" cy="87868"/>
+          </a:xfrm>
+          <a:prstGeom prst="ellipse">
+            <a:avLst/>
+          </a:prstGeom>
+        </p:spPr>
+        <p:style>
+          <a:lnRef idx="2">
+            <a:schemeClr val="dk1">
+              <a:shade val="15000"/>
+            </a:schemeClr>
+          </a:lnRef>
+          <a:fillRef idx="1">
+            <a:schemeClr val="dk1"/>
+          </a:fillRef>
+          <a:effectRef idx="0">
+            <a:schemeClr val="dk1"/>
+          </a:effectRef>
+          <a:fontRef idx="minor">
+            <a:schemeClr val="lt1"/>
+          </a:fontRef>
+        </p:style>
+        <p:txBody>
+          <a:bodyPr rtlCol="1" anchor="ctr"/>
+          <a:lstStyle/>
+          <a:p>
+            <a:pPr algn="ctr"/>
+            <a:endParaRPr lang="he-IL"/>
+          </a:p>
+        </p:txBody>
+      </p:sp>
+      <p:sp>
+        <p:nvSpPr>
+          <p:cNvPr id="30" name="אליפסה 29">
+            <a:extLst>
+              <a:ext uri="{FF2B5EF4-FFF2-40B4-BE49-F238E27FC236}">
+                <a16:creationId xmlns:a16="http://schemas.microsoft.com/office/drawing/2014/main" id="{6BE68970-4D05-6EB0-A428-5BFC0CB1E493}"/>
+              </a:ext>
+            </a:extLst>
+          </p:cNvPr>
+          <p:cNvSpPr/>
+          <p:nvPr/>
+        </p:nvSpPr>
+        <p:spPr>
+          <a:xfrm>
+            <a:off x="3618688" y="578271"/>
+            <a:ext cx="45719" cy="87868"/>
+          </a:xfrm>
+          <a:prstGeom prst="ellipse">
+            <a:avLst/>
+          </a:prstGeom>
+        </p:spPr>
+        <p:style>
+          <a:lnRef idx="2">
+            <a:schemeClr val="dk1">
+              <a:shade val="15000"/>
+            </a:schemeClr>
+          </a:lnRef>
+          <a:fillRef idx="1">
+            <a:schemeClr val="dk1"/>
+          </a:fillRef>
+          <a:effectRef idx="0">
+            <a:schemeClr val="dk1"/>
+          </a:effectRef>
+          <a:fontRef idx="minor">
+            <a:schemeClr val="lt1"/>
+          </a:fontRef>
+        </p:style>
+        <p:txBody>
+          <a:bodyPr rtlCol="1" anchor="ctr"/>
+          <a:lstStyle/>
+          <a:p>
+            <a:pPr algn="ctr"/>
+            <a:endParaRPr lang="he-IL"/>
+          </a:p>
+        </p:txBody>
+      </p:sp>
+      <p:sp>
+        <p:nvSpPr>
+          <p:cNvPr id="31" name="אליפסה 30">
+            <a:extLst>
+              <a:ext uri="{FF2B5EF4-FFF2-40B4-BE49-F238E27FC236}">
+                <a16:creationId xmlns:a16="http://schemas.microsoft.com/office/drawing/2014/main" id="{311AB6B7-899F-1DCB-9141-5A2E244EB8CF}"/>
+              </a:ext>
+            </a:extLst>
+          </p:cNvPr>
+          <p:cNvSpPr/>
+          <p:nvPr/>
+        </p:nvSpPr>
+        <p:spPr>
+          <a:xfrm>
+            <a:off x="3618689" y="706185"/>
+            <a:ext cx="45719" cy="87868"/>
+          </a:xfrm>
+          <a:prstGeom prst="ellipse">
+            <a:avLst/>
+          </a:prstGeom>
+        </p:spPr>
+        <p:style>
+          <a:lnRef idx="2">
+            <a:schemeClr val="dk1">
+              <a:shade val="15000"/>
+            </a:schemeClr>
+          </a:lnRef>
+          <a:fillRef idx="1">
+            <a:schemeClr val="dk1"/>
+          </a:fillRef>
+          <a:effectRef idx="0">
+            <a:schemeClr val="dk1"/>
+          </a:effectRef>
+          <a:fontRef idx="minor">
+            <a:schemeClr val="lt1"/>
+          </a:fontRef>
+        </p:style>
+        <p:txBody>
+          <a:bodyPr rtlCol="1" anchor="ctr"/>
+          <a:lstStyle/>
+          <a:p>
+            <a:pPr algn="ctr" rtl="0"/>
+            <a:endParaRPr lang="he-IL" dirty="0"/>
+          </a:p>
+        </p:txBody>
+      </p:sp>
+      <p:sp>
+        <p:nvSpPr>
+          <p:cNvPr id="32" name="מלבן 31">
+            <a:extLst>
+              <a:ext uri="{FF2B5EF4-FFF2-40B4-BE49-F238E27FC236}">
+                <a16:creationId xmlns:a16="http://schemas.microsoft.com/office/drawing/2014/main" id="{0291220F-A4FC-15F0-9C3F-63997D75194D}"/>
+              </a:ext>
+            </a:extLst>
+          </p:cNvPr>
+          <p:cNvSpPr/>
+          <p:nvPr/>
+        </p:nvSpPr>
+        <p:spPr>
+          <a:xfrm>
+            <a:off x="7217924" y="3824186"/>
+            <a:ext cx="428017" cy="300367"/>
+          </a:xfrm>
+          <a:prstGeom prst="rect">
+            <a:avLst/>
+          </a:prstGeom>
+        </p:spPr>
+        <p:style>
+          <a:lnRef idx="2">
+            <a:schemeClr val="accent1">
+              <a:shade val="15000"/>
+            </a:schemeClr>
+          </a:lnRef>
+          <a:fillRef idx="1">
+            <a:schemeClr val="accent1"/>
+          </a:fillRef>
+          <a:effectRef idx="0">
+            <a:schemeClr val="accent1"/>
+          </a:effectRef>
+          <a:fontRef idx="minor">
+            <a:schemeClr val="lt1"/>
+          </a:fontRef>
+        </p:style>
+        <p:txBody>
+          <a:bodyPr rtlCol="1" anchor="ctr"/>
+          <a:lstStyle/>
+          <a:p>
+            <a:pPr algn="ctr"/>
+            <a:endParaRPr lang="he-IL" dirty="0"/>
+          </a:p>
+        </p:txBody>
+      </p:sp>
+      <p:sp>
+        <p:nvSpPr>
+          <p:cNvPr id="33" name="תיבת טקסט 32">
+            <a:extLst>
+              <a:ext uri="{FF2B5EF4-FFF2-40B4-BE49-F238E27FC236}">
+                <a16:creationId xmlns:a16="http://schemas.microsoft.com/office/drawing/2014/main" id="{631E2DCF-99F7-6511-7B43-0CF264ADBEE3}"/>
+              </a:ext>
+            </a:extLst>
+          </p:cNvPr>
+          <p:cNvSpPr txBox="1"/>
+          <p:nvPr/>
+        </p:nvSpPr>
+        <p:spPr>
+          <a:xfrm>
+            <a:off x="5398853" y="3766519"/>
+            <a:ext cx="1640732" cy="369332"/>
+          </a:xfrm>
+          <a:prstGeom prst="rect">
+            <a:avLst/>
+          </a:prstGeom>
+          <a:noFill/>
+        </p:spPr>
+        <p:txBody>
+          <a:bodyPr wrap="square" rtlCol="1">
+            <a:spAutoFit/>
+          </a:bodyPr>
+          <a:lstStyle/>
+          <a:p>
+            <a:pPr algn="r"/>
+            <a:r>
+              <a:rPr lang="he-IL" dirty="0"/>
+              <a:t>מצרך ארבע</a:t>
+            </a:r>
+          </a:p>
+        </p:txBody>
+      </p:sp>
+      <p:sp>
+        <p:nvSpPr>
+          <p:cNvPr id="34" name="מלבן 33">
+            <a:extLst>
+              <a:ext uri="{FF2B5EF4-FFF2-40B4-BE49-F238E27FC236}">
+                <a16:creationId xmlns:a16="http://schemas.microsoft.com/office/drawing/2014/main" id="{2C9F9A4F-4294-726E-D951-F99EF2F259FA}"/>
+              </a:ext>
+            </a:extLst>
+          </p:cNvPr>
+          <p:cNvSpPr/>
+          <p:nvPr/>
+        </p:nvSpPr>
+        <p:spPr>
+          <a:xfrm>
+            <a:off x="7217924" y="4379043"/>
+            <a:ext cx="428017" cy="300367"/>
+          </a:xfrm>
+          <a:prstGeom prst="rect">
+            <a:avLst/>
+          </a:prstGeom>
+        </p:spPr>
+        <p:style>
+          <a:lnRef idx="2">
+            <a:schemeClr val="accent1">
+              <a:shade val="15000"/>
+            </a:schemeClr>
+          </a:lnRef>
+          <a:fillRef idx="1">
+            <a:schemeClr val="accent1"/>
+          </a:fillRef>
+          <a:effectRef idx="0">
+            <a:schemeClr val="accent1"/>
+          </a:effectRef>
+          <a:fontRef idx="minor">
+            <a:schemeClr val="lt1"/>
+          </a:fontRef>
+        </p:style>
+        <p:txBody>
+          <a:bodyPr rtlCol="1" anchor="ctr"/>
+          <a:lstStyle/>
+          <a:p>
+            <a:pPr algn="ctr"/>
+            <a:endParaRPr lang="he-IL" dirty="0"/>
+          </a:p>
+        </p:txBody>
+      </p:sp>
+      <p:sp>
+        <p:nvSpPr>
+          <p:cNvPr id="35" name="תיבת טקסט 34">
+            <a:extLst>
+              <a:ext uri="{FF2B5EF4-FFF2-40B4-BE49-F238E27FC236}">
+                <a16:creationId xmlns:a16="http://schemas.microsoft.com/office/drawing/2014/main" id="{7EB99E71-5EE5-16A5-1D8A-BA470BCECFBF}"/>
+              </a:ext>
+            </a:extLst>
+          </p:cNvPr>
+          <p:cNvSpPr txBox="1"/>
+          <p:nvPr/>
+        </p:nvSpPr>
+        <p:spPr>
+          <a:xfrm>
+            <a:off x="5398853" y="4344560"/>
+            <a:ext cx="1640732" cy="369332"/>
+          </a:xfrm>
+          <a:prstGeom prst="rect">
+            <a:avLst/>
+          </a:prstGeom>
+          <a:noFill/>
+        </p:spPr>
+        <p:txBody>
+          <a:bodyPr wrap="square" rtlCol="1">
+            <a:spAutoFit/>
+          </a:bodyPr>
+          <a:lstStyle/>
+          <a:p>
+            <a:pPr algn="r"/>
+            <a:r>
+              <a:rPr lang="he-IL" dirty="0"/>
+              <a:t>מצרך חמש</a:t>
+            </a:r>
+          </a:p>
+        </p:txBody>
+      </p:sp>
+      <p:sp>
+        <p:nvSpPr>
+          <p:cNvPr id="36" name="מלבן 35">
+            <a:extLst>
+              <a:ext uri="{FF2B5EF4-FFF2-40B4-BE49-F238E27FC236}">
+                <a16:creationId xmlns:a16="http://schemas.microsoft.com/office/drawing/2014/main" id="{4E3B771F-9207-D608-B646-ECB155967410}"/>
+              </a:ext>
+            </a:extLst>
+          </p:cNvPr>
+          <p:cNvSpPr/>
+          <p:nvPr/>
+        </p:nvSpPr>
+        <p:spPr>
+          <a:xfrm>
+            <a:off x="7217924" y="5346052"/>
+            <a:ext cx="428017" cy="300367"/>
+          </a:xfrm>
+          <a:prstGeom prst="rect">
+            <a:avLst/>
+          </a:prstGeom>
+        </p:spPr>
+        <p:style>
+          <a:lnRef idx="2">
+            <a:schemeClr val="accent1">
+              <a:shade val="15000"/>
+            </a:schemeClr>
+          </a:lnRef>
+          <a:fillRef idx="1">
+            <a:schemeClr val="accent1"/>
+          </a:fillRef>
+          <a:effectRef idx="0">
+            <a:schemeClr val="accent1"/>
+          </a:effectRef>
+          <a:fontRef idx="minor">
+            <a:schemeClr val="lt1"/>
+          </a:fontRef>
+        </p:style>
+        <p:txBody>
+          <a:bodyPr rtlCol="1" anchor="ctr"/>
+          <a:lstStyle/>
+          <a:p>
+            <a:pPr algn="ctr"/>
+            <a:endParaRPr lang="he-IL" dirty="0"/>
+          </a:p>
+        </p:txBody>
+      </p:sp>
+      <p:sp>
+        <p:nvSpPr>
+          <p:cNvPr id="37" name="תיבת טקסט 36">
+            <a:extLst>
+              <a:ext uri="{FF2B5EF4-FFF2-40B4-BE49-F238E27FC236}">
+                <a16:creationId xmlns:a16="http://schemas.microsoft.com/office/drawing/2014/main" id="{2DC8F413-BC4E-FC39-C594-7129F988CD23}"/>
+              </a:ext>
+            </a:extLst>
+          </p:cNvPr>
+          <p:cNvSpPr txBox="1"/>
+          <p:nvPr/>
+        </p:nvSpPr>
+        <p:spPr>
+          <a:xfrm>
+            <a:off x="5398853" y="5288385"/>
+            <a:ext cx="1640732" cy="369332"/>
+          </a:xfrm>
+          <a:prstGeom prst="rect">
+            <a:avLst/>
+          </a:prstGeom>
+          <a:noFill/>
+        </p:spPr>
+        <p:txBody>
+          <a:bodyPr wrap="square" rtlCol="1">
+            <a:spAutoFit/>
+          </a:bodyPr>
+          <a:lstStyle/>
+          <a:p>
+            <a:pPr algn="r"/>
+            <a:r>
+              <a:rPr lang="he-IL" dirty="0"/>
+              <a:t>מצרך ארבע</a:t>
+            </a:r>
+          </a:p>
+        </p:txBody>
+      </p:sp>
+      <p:sp>
+        <p:nvSpPr>
+          <p:cNvPr id="38" name="מלבן 37">
+            <a:extLst>
+              <a:ext uri="{FF2B5EF4-FFF2-40B4-BE49-F238E27FC236}">
+                <a16:creationId xmlns:a16="http://schemas.microsoft.com/office/drawing/2014/main" id="{FAB03365-C005-E2C4-4223-30D803FAA074}"/>
+              </a:ext>
+            </a:extLst>
+          </p:cNvPr>
+          <p:cNvSpPr/>
+          <p:nvPr/>
+        </p:nvSpPr>
+        <p:spPr>
+          <a:xfrm>
+            <a:off x="7217924" y="5842541"/>
+            <a:ext cx="428017" cy="300367"/>
+          </a:xfrm>
+          <a:prstGeom prst="rect">
+            <a:avLst/>
+          </a:prstGeom>
+        </p:spPr>
+        <p:style>
+          <a:lnRef idx="2">
+            <a:schemeClr val="accent1">
+              <a:shade val="15000"/>
+            </a:schemeClr>
+          </a:lnRef>
+          <a:fillRef idx="1">
+            <a:schemeClr val="accent1"/>
+          </a:fillRef>
+          <a:effectRef idx="0">
+            <a:schemeClr val="accent1"/>
+          </a:effectRef>
+          <a:fontRef idx="minor">
+            <a:schemeClr val="lt1"/>
+          </a:fontRef>
+        </p:style>
+        <p:txBody>
+          <a:bodyPr rtlCol="1" anchor="ctr"/>
+          <a:lstStyle/>
+          <a:p>
+            <a:pPr algn="ctr"/>
+            <a:endParaRPr lang="he-IL" dirty="0"/>
+          </a:p>
+        </p:txBody>
+      </p:sp>
+      <p:sp>
+        <p:nvSpPr>
+          <p:cNvPr id="39" name="תיבת טקסט 38">
+            <a:extLst>
+              <a:ext uri="{FF2B5EF4-FFF2-40B4-BE49-F238E27FC236}">
+                <a16:creationId xmlns:a16="http://schemas.microsoft.com/office/drawing/2014/main" id="{2359F52E-52B0-F6C8-91D2-4E6903892D47}"/>
+              </a:ext>
+            </a:extLst>
+          </p:cNvPr>
+          <p:cNvSpPr txBox="1"/>
+          <p:nvPr/>
+        </p:nvSpPr>
+        <p:spPr>
+          <a:xfrm>
+            <a:off x="5398853" y="5808058"/>
+            <a:ext cx="1640732" cy="369332"/>
+          </a:xfrm>
+          <a:prstGeom prst="rect">
+            <a:avLst/>
+          </a:prstGeom>
+          <a:noFill/>
+        </p:spPr>
+        <p:txBody>
+          <a:bodyPr wrap="square" rtlCol="1">
+            <a:spAutoFit/>
+          </a:bodyPr>
+          <a:lstStyle/>
+          <a:p>
+            <a:pPr algn="r"/>
+            <a:r>
+              <a:rPr lang="he-IL" dirty="0"/>
+              <a:t>מצרך חמש</a:t>
+            </a:r>
+          </a:p>
+        </p:txBody>
+      </p:sp>
+      <p:sp>
+        <p:nvSpPr>
+          <p:cNvPr id="40" name="תיבת טקסט 39">
+            <a:extLst>
+              <a:ext uri="{FF2B5EF4-FFF2-40B4-BE49-F238E27FC236}">
+                <a16:creationId xmlns:a16="http://schemas.microsoft.com/office/drawing/2014/main" id="{732D9F9D-334E-16F8-1BD8-EFDAC0A7D82F}"/>
+              </a:ext>
+            </a:extLst>
+          </p:cNvPr>
+          <p:cNvSpPr txBox="1"/>
+          <p:nvPr/>
+        </p:nvSpPr>
+        <p:spPr>
+          <a:xfrm>
+            <a:off x="6031150" y="2264358"/>
+            <a:ext cx="1640732" cy="369332"/>
+          </a:xfrm>
+          <a:prstGeom prst="rect">
+            <a:avLst/>
+          </a:prstGeom>
+          <a:noFill/>
+        </p:spPr>
+        <p:txBody>
+          <a:bodyPr wrap="square" rtlCol="1">
+            <a:spAutoFit/>
+          </a:bodyPr>
+          <a:lstStyle/>
+          <a:p>
+            <a:pPr algn="r"/>
+            <a:r>
+              <a:rPr lang="he-IL" dirty="0"/>
+              <a:t>מאפים</a:t>
+            </a:r>
+          </a:p>
+        </p:txBody>
+      </p:sp>
+      <p:sp>
+        <p:nvSpPr>
+          <p:cNvPr id="41" name="תיבת טקסט 40">
+            <a:extLst>
+              <a:ext uri="{FF2B5EF4-FFF2-40B4-BE49-F238E27FC236}">
+                <a16:creationId xmlns:a16="http://schemas.microsoft.com/office/drawing/2014/main" id="{3CDA78C0-97DE-BE71-5DC0-B50EFB058542}"/>
+              </a:ext>
+            </a:extLst>
+          </p:cNvPr>
+          <p:cNvSpPr txBox="1"/>
+          <p:nvPr/>
+        </p:nvSpPr>
+        <p:spPr>
+          <a:xfrm>
+            <a:off x="6031150" y="4790861"/>
+            <a:ext cx="1640732" cy="369332"/>
+          </a:xfrm>
+          <a:prstGeom prst="rect">
+            <a:avLst/>
+          </a:prstGeom>
+          <a:noFill/>
+        </p:spPr>
+        <p:txBody>
+          <a:bodyPr wrap="square" rtlCol="1">
+            <a:spAutoFit/>
+          </a:bodyPr>
+          <a:lstStyle/>
+          <a:p>
+            <a:pPr algn="r"/>
+            <a:r>
+              <a:rPr lang="he-IL" dirty="0"/>
+              <a:t>בשר</a:t>
+            </a:r>
+          </a:p>
+        </p:txBody>
+      </p:sp>
+      <p:sp>
+        <p:nvSpPr>
+          <p:cNvPr id="42" name="מלבן 41">
+            <a:extLst>
+              <a:ext uri="{FF2B5EF4-FFF2-40B4-BE49-F238E27FC236}">
+                <a16:creationId xmlns:a16="http://schemas.microsoft.com/office/drawing/2014/main" id="{E04AC49A-5AD7-26C9-DA38-4B3F390D65F4}"/>
+              </a:ext>
+            </a:extLst>
+          </p:cNvPr>
+          <p:cNvSpPr/>
+          <p:nvPr/>
+        </p:nvSpPr>
+        <p:spPr>
+          <a:xfrm>
+            <a:off x="3427538" y="2745910"/>
+            <a:ext cx="711646" cy="560953"/>
+          </a:xfrm>
+          <a:custGeom>
+            <a:avLst/>
+            <a:gdLst>
+              <a:gd name="csX0" fmla="*/ 0 w 719364"/>
+              <a:gd name="csY0" fmla="*/ 0 h 554857"/>
+              <a:gd name="csX1" fmla="*/ 719364 w 719364"/>
+              <a:gd name="csY1" fmla="*/ 0 h 554857"/>
+              <a:gd name="csX2" fmla="*/ 719364 w 719364"/>
+              <a:gd name="csY2" fmla="*/ 554857 h 554857"/>
+              <a:gd name="csX3" fmla="*/ 0 w 719364"/>
+              <a:gd name="csY3" fmla="*/ 554857 h 554857"/>
+              <a:gd name="csX4" fmla="*/ 0 w 719364"/>
+              <a:gd name="csY4" fmla="*/ 0 h 554857"/>
+              <a:gd name="csX0" fmla="*/ 0 w 719364"/>
+              <a:gd name="csY0" fmla="*/ 0 h 554857"/>
+              <a:gd name="csX1" fmla="*/ 719364 w 719364"/>
+              <a:gd name="csY1" fmla="*/ 0 h 554857"/>
+              <a:gd name="csX2" fmla="*/ 711646 w 719364"/>
+              <a:gd name="csY2" fmla="*/ 235034 h 554857"/>
+              <a:gd name="csX3" fmla="*/ 719364 w 719364"/>
+              <a:gd name="csY3" fmla="*/ 554857 h 554857"/>
+              <a:gd name="csX4" fmla="*/ 0 w 719364"/>
+              <a:gd name="csY4" fmla="*/ 554857 h 554857"/>
+              <a:gd name="csX5" fmla="*/ 0 w 719364"/>
+              <a:gd name="csY5" fmla="*/ 0 h 554857"/>
+              <a:gd name="csX0" fmla="*/ 0 w 719364"/>
+              <a:gd name="csY0" fmla="*/ 0 h 554857"/>
+              <a:gd name="csX1" fmla="*/ 719364 w 719364"/>
+              <a:gd name="csY1" fmla="*/ 0 h 554857"/>
+              <a:gd name="csX2" fmla="*/ 711646 w 719364"/>
+              <a:gd name="csY2" fmla="*/ 235034 h 554857"/>
+              <a:gd name="csX3" fmla="*/ 711646 w 719364"/>
+              <a:gd name="csY3" fmla="*/ 424010 h 554857"/>
+              <a:gd name="csX4" fmla="*/ 719364 w 719364"/>
+              <a:gd name="csY4" fmla="*/ 554857 h 554857"/>
+              <a:gd name="csX5" fmla="*/ 0 w 719364"/>
+              <a:gd name="csY5" fmla="*/ 554857 h 554857"/>
+              <a:gd name="csX6" fmla="*/ 0 w 719364"/>
+              <a:gd name="csY6" fmla="*/ 0 h 554857"/>
+              <a:gd name="csX0" fmla="*/ 0 w 719364"/>
+              <a:gd name="csY0" fmla="*/ 0 h 554857"/>
+              <a:gd name="csX1" fmla="*/ 591348 w 719364"/>
+              <a:gd name="csY1" fmla="*/ 12192 h 554857"/>
+              <a:gd name="csX2" fmla="*/ 711646 w 719364"/>
+              <a:gd name="csY2" fmla="*/ 235034 h 554857"/>
+              <a:gd name="csX3" fmla="*/ 711646 w 719364"/>
+              <a:gd name="csY3" fmla="*/ 424010 h 554857"/>
+              <a:gd name="csX4" fmla="*/ 719364 w 719364"/>
+              <a:gd name="csY4" fmla="*/ 554857 h 554857"/>
+              <a:gd name="csX5" fmla="*/ 0 w 719364"/>
+              <a:gd name="csY5" fmla="*/ 554857 h 554857"/>
+              <a:gd name="csX6" fmla="*/ 0 w 719364"/>
+              <a:gd name="csY6" fmla="*/ 0 h 554857"/>
+              <a:gd name="csX0" fmla="*/ 0 w 711646"/>
+              <a:gd name="csY0" fmla="*/ 0 h 560953"/>
+              <a:gd name="csX1" fmla="*/ 591348 w 711646"/>
+              <a:gd name="csY1" fmla="*/ 12192 h 560953"/>
+              <a:gd name="csX2" fmla="*/ 711646 w 711646"/>
+              <a:gd name="csY2" fmla="*/ 235034 h 560953"/>
+              <a:gd name="csX3" fmla="*/ 711646 w 711646"/>
+              <a:gd name="csY3" fmla="*/ 424010 h 560953"/>
+              <a:gd name="csX4" fmla="*/ 566964 w 711646"/>
+              <a:gd name="csY4" fmla="*/ 560953 h 560953"/>
+              <a:gd name="csX5" fmla="*/ 0 w 711646"/>
+              <a:gd name="csY5" fmla="*/ 554857 h 560953"/>
+              <a:gd name="csX6" fmla="*/ 0 w 711646"/>
+              <a:gd name="csY6" fmla="*/ 0 h 560953"/>
+            </a:gdLst>
+            <a:ahLst/>
+            <a:cxnLst>
+              <a:cxn ang="0">
+                <a:pos x="csX0" y="csY0"/>
+              </a:cxn>
+              <a:cxn ang="0">
+                <a:pos x="csX1" y="csY1"/>
+              </a:cxn>
+              <a:cxn ang="0">
+                <a:pos x="csX2" y="csY2"/>
+              </a:cxn>
+              <a:cxn ang="0">
+                <a:pos x="csX3" y="csY3"/>
+              </a:cxn>
+              <a:cxn ang="0">
+                <a:pos x="csX4" y="csY4"/>
+              </a:cxn>
+              <a:cxn ang="0">
+                <a:pos x="csX5" y="csY5"/>
+              </a:cxn>
+              <a:cxn ang="0">
+                <a:pos x="csX6" y="csY6"/>
+              </a:cxn>
+            </a:cxnLst>
+            <a:rect l="l" t="t" r="r" b="b"/>
+            <a:pathLst>
+              <a:path w="711646" h="560953">
+                <a:moveTo>
+                  <a:pt x="0" y="0"/>
+                </a:moveTo>
+                <a:lnTo>
+                  <a:pt x="591348" y="12192"/>
+                </a:lnTo>
+                <a:lnTo>
+                  <a:pt x="711646" y="235034"/>
+                </a:lnTo>
+                <a:lnTo>
+                  <a:pt x="711646" y="424010"/>
+                </a:lnTo>
+                <a:lnTo>
+                  <a:pt x="566964" y="560953"/>
+                </a:lnTo>
+                <a:lnTo>
+                  <a:pt x="0" y="554857"/>
+                </a:lnTo>
+                <a:lnTo>
+                  <a:pt x="0" y="0"/>
+                </a:lnTo>
+                <a:close/>
+              </a:path>
+            </a:pathLst>
+          </a:custGeom>
+        </p:spPr>
+        <p:style>
+          <a:lnRef idx="2">
+            <a:schemeClr val="accent1">
+              <a:shade val="15000"/>
+            </a:schemeClr>
+          </a:lnRef>
+          <a:fillRef idx="1">
+            <a:schemeClr val="accent1"/>
+          </a:fillRef>
+          <a:effectRef idx="0">
+            <a:schemeClr val="accent1"/>
+          </a:effectRef>
+          <a:fontRef idx="minor">
+            <a:schemeClr val="lt1"/>
+          </a:fontRef>
+        </p:style>
+        <p:txBody>
+          <a:bodyPr rtlCol="1" anchor="ctr"/>
+          <a:lstStyle/>
+          <a:p>
+            <a:pPr algn="ctr" rtl="0"/>
+            <a:r>
+              <a:rPr lang="he-IL" sz="1400" dirty="0"/>
+              <a:t>להיום</a:t>
+            </a:r>
+          </a:p>
+        </p:txBody>
+      </p:sp>
+      <p:sp>
+        <p:nvSpPr>
+          <p:cNvPr id="43" name="מלבן 41">
+            <a:extLst>
+              <a:ext uri="{FF2B5EF4-FFF2-40B4-BE49-F238E27FC236}">
+                <a16:creationId xmlns:a16="http://schemas.microsoft.com/office/drawing/2014/main" id="{4229303A-60D4-844D-316A-9BE2E66E3FF4}"/>
+              </a:ext>
+            </a:extLst>
+          </p:cNvPr>
+          <p:cNvSpPr/>
+          <p:nvPr/>
+        </p:nvSpPr>
+        <p:spPr>
+          <a:xfrm>
+            <a:off x="3427538" y="3601134"/>
+            <a:ext cx="711646" cy="560953"/>
+          </a:xfrm>
+          <a:custGeom>
+            <a:avLst/>
+            <a:gdLst>
+              <a:gd name="csX0" fmla="*/ 0 w 719364"/>
+              <a:gd name="csY0" fmla="*/ 0 h 554857"/>
+              <a:gd name="csX1" fmla="*/ 719364 w 719364"/>
+              <a:gd name="csY1" fmla="*/ 0 h 554857"/>
+              <a:gd name="csX2" fmla="*/ 719364 w 719364"/>
+              <a:gd name="csY2" fmla="*/ 554857 h 554857"/>
+              <a:gd name="csX3" fmla="*/ 0 w 719364"/>
+              <a:gd name="csY3" fmla="*/ 554857 h 554857"/>
+              <a:gd name="csX4" fmla="*/ 0 w 719364"/>
+              <a:gd name="csY4" fmla="*/ 0 h 554857"/>
+              <a:gd name="csX0" fmla="*/ 0 w 719364"/>
+              <a:gd name="csY0" fmla="*/ 0 h 554857"/>
+              <a:gd name="csX1" fmla="*/ 719364 w 719364"/>
+              <a:gd name="csY1" fmla="*/ 0 h 554857"/>
+              <a:gd name="csX2" fmla="*/ 711646 w 719364"/>
+              <a:gd name="csY2" fmla="*/ 235034 h 554857"/>
+              <a:gd name="csX3" fmla="*/ 719364 w 719364"/>
+              <a:gd name="csY3" fmla="*/ 554857 h 554857"/>
+              <a:gd name="csX4" fmla="*/ 0 w 719364"/>
+              <a:gd name="csY4" fmla="*/ 554857 h 554857"/>
+              <a:gd name="csX5" fmla="*/ 0 w 719364"/>
+              <a:gd name="csY5" fmla="*/ 0 h 554857"/>
+              <a:gd name="csX0" fmla="*/ 0 w 719364"/>
+              <a:gd name="csY0" fmla="*/ 0 h 554857"/>
+              <a:gd name="csX1" fmla="*/ 719364 w 719364"/>
+              <a:gd name="csY1" fmla="*/ 0 h 554857"/>
+              <a:gd name="csX2" fmla="*/ 711646 w 719364"/>
+              <a:gd name="csY2" fmla="*/ 235034 h 554857"/>
+              <a:gd name="csX3" fmla="*/ 711646 w 719364"/>
+              <a:gd name="csY3" fmla="*/ 424010 h 554857"/>
+              <a:gd name="csX4" fmla="*/ 719364 w 719364"/>
+              <a:gd name="csY4" fmla="*/ 554857 h 554857"/>
+              <a:gd name="csX5" fmla="*/ 0 w 719364"/>
+              <a:gd name="csY5" fmla="*/ 554857 h 554857"/>
+              <a:gd name="csX6" fmla="*/ 0 w 719364"/>
+              <a:gd name="csY6" fmla="*/ 0 h 554857"/>
+              <a:gd name="csX0" fmla="*/ 0 w 719364"/>
+              <a:gd name="csY0" fmla="*/ 0 h 554857"/>
+              <a:gd name="csX1" fmla="*/ 591348 w 719364"/>
+              <a:gd name="csY1" fmla="*/ 12192 h 554857"/>
+              <a:gd name="csX2" fmla="*/ 711646 w 719364"/>
+              <a:gd name="csY2" fmla="*/ 235034 h 554857"/>
+              <a:gd name="csX3" fmla="*/ 711646 w 719364"/>
+              <a:gd name="csY3" fmla="*/ 424010 h 554857"/>
+              <a:gd name="csX4" fmla="*/ 719364 w 719364"/>
+              <a:gd name="csY4" fmla="*/ 554857 h 554857"/>
+              <a:gd name="csX5" fmla="*/ 0 w 719364"/>
+              <a:gd name="csY5" fmla="*/ 554857 h 554857"/>
+              <a:gd name="csX6" fmla="*/ 0 w 719364"/>
+              <a:gd name="csY6" fmla="*/ 0 h 554857"/>
+              <a:gd name="csX0" fmla="*/ 0 w 711646"/>
+              <a:gd name="csY0" fmla="*/ 0 h 560953"/>
+              <a:gd name="csX1" fmla="*/ 591348 w 711646"/>
+              <a:gd name="csY1" fmla="*/ 12192 h 560953"/>
+              <a:gd name="csX2" fmla="*/ 711646 w 711646"/>
+              <a:gd name="csY2" fmla="*/ 235034 h 560953"/>
+              <a:gd name="csX3" fmla="*/ 711646 w 711646"/>
+              <a:gd name="csY3" fmla="*/ 424010 h 560953"/>
+              <a:gd name="csX4" fmla="*/ 566964 w 711646"/>
+              <a:gd name="csY4" fmla="*/ 560953 h 560953"/>
+              <a:gd name="csX5" fmla="*/ 0 w 711646"/>
+              <a:gd name="csY5" fmla="*/ 554857 h 560953"/>
+              <a:gd name="csX6" fmla="*/ 0 w 711646"/>
+              <a:gd name="csY6" fmla="*/ 0 h 560953"/>
+            </a:gdLst>
+            <a:ahLst/>
+            <a:cxnLst>
+              <a:cxn ang="0">
+                <a:pos x="csX0" y="csY0"/>
+              </a:cxn>
+              <a:cxn ang="0">
+                <a:pos x="csX1" y="csY1"/>
+              </a:cxn>
+              <a:cxn ang="0">
+                <a:pos x="csX2" y="csY2"/>
+              </a:cxn>
+              <a:cxn ang="0">
+                <a:pos x="csX3" y="csY3"/>
+              </a:cxn>
+              <a:cxn ang="0">
+                <a:pos x="csX4" y="csY4"/>
+              </a:cxn>
+              <a:cxn ang="0">
+                <a:pos x="csX5" y="csY5"/>
+              </a:cxn>
+              <a:cxn ang="0">
+                <a:pos x="csX6" y="csY6"/>
+              </a:cxn>
+            </a:cxnLst>
+            <a:rect l="l" t="t" r="r" b="b"/>
+            <a:pathLst>
+              <a:path w="711646" h="560953">
+                <a:moveTo>
+                  <a:pt x="0" y="0"/>
+                </a:moveTo>
+                <a:lnTo>
+                  <a:pt x="591348" y="12192"/>
+                </a:lnTo>
+                <a:lnTo>
+                  <a:pt x="711646" y="235034"/>
+                </a:lnTo>
+                <a:lnTo>
+                  <a:pt x="711646" y="424010"/>
+                </a:lnTo>
+                <a:lnTo>
+                  <a:pt x="566964" y="560953"/>
+                </a:lnTo>
+                <a:lnTo>
+                  <a:pt x="0" y="554857"/>
+                </a:lnTo>
+                <a:lnTo>
+                  <a:pt x="0" y="0"/>
+                </a:lnTo>
+                <a:close/>
+              </a:path>
+            </a:pathLst>
+          </a:custGeom>
+        </p:spPr>
+        <p:style>
+          <a:lnRef idx="2">
+            <a:schemeClr val="accent1">
+              <a:shade val="15000"/>
+            </a:schemeClr>
+          </a:lnRef>
+          <a:fillRef idx="1">
+            <a:schemeClr val="accent1"/>
+          </a:fillRef>
+          <a:effectRef idx="0">
+            <a:schemeClr val="accent1"/>
+          </a:effectRef>
+          <a:fontRef idx="minor">
+            <a:schemeClr val="lt1"/>
+          </a:fontRef>
+        </p:style>
+        <p:txBody>
+          <a:bodyPr rtlCol="1" anchor="ctr"/>
+          <a:lstStyle/>
+          <a:p>
+            <a:pPr algn="ctr" rtl="0"/>
+            <a:r>
+              <a:rPr lang="he-IL" sz="1400" dirty="0"/>
+              <a:t>השבוע</a:t>
+            </a:r>
+          </a:p>
+        </p:txBody>
+      </p:sp>
+      <p:sp>
+        <p:nvSpPr>
+          <p:cNvPr id="45" name="מלבן 41">
+            <a:extLst>
+              <a:ext uri="{FF2B5EF4-FFF2-40B4-BE49-F238E27FC236}">
+                <a16:creationId xmlns:a16="http://schemas.microsoft.com/office/drawing/2014/main" id="{D2C7E708-EEFF-78DD-C384-4352F0192E44}"/>
+              </a:ext>
+            </a:extLst>
+          </p:cNvPr>
+          <p:cNvSpPr/>
+          <p:nvPr/>
+        </p:nvSpPr>
+        <p:spPr>
+          <a:xfrm>
+            <a:off x="3427538" y="4529226"/>
+            <a:ext cx="711646" cy="560953"/>
+          </a:xfrm>
+          <a:custGeom>
+            <a:avLst/>
+            <a:gdLst>
+              <a:gd name="csX0" fmla="*/ 0 w 719364"/>
+              <a:gd name="csY0" fmla="*/ 0 h 554857"/>
+              <a:gd name="csX1" fmla="*/ 719364 w 719364"/>
+              <a:gd name="csY1" fmla="*/ 0 h 554857"/>
+              <a:gd name="csX2" fmla="*/ 719364 w 719364"/>
+              <a:gd name="csY2" fmla="*/ 554857 h 554857"/>
+              <a:gd name="csX3" fmla="*/ 0 w 719364"/>
+              <a:gd name="csY3" fmla="*/ 554857 h 554857"/>
+              <a:gd name="csX4" fmla="*/ 0 w 719364"/>
+              <a:gd name="csY4" fmla="*/ 0 h 554857"/>
+              <a:gd name="csX0" fmla="*/ 0 w 719364"/>
+              <a:gd name="csY0" fmla="*/ 0 h 554857"/>
+              <a:gd name="csX1" fmla="*/ 719364 w 719364"/>
+              <a:gd name="csY1" fmla="*/ 0 h 554857"/>
+              <a:gd name="csX2" fmla="*/ 711646 w 719364"/>
+              <a:gd name="csY2" fmla="*/ 235034 h 554857"/>
+              <a:gd name="csX3" fmla="*/ 719364 w 719364"/>
+              <a:gd name="csY3" fmla="*/ 554857 h 554857"/>
+              <a:gd name="csX4" fmla="*/ 0 w 719364"/>
+              <a:gd name="csY4" fmla="*/ 554857 h 554857"/>
+              <a:gd name="csX5" fmla="*/ 0 w 719364"/>
+              <a:gd name="csY5" fmla="*/ 0 h 554857"/>
+              <a:gd name="csX0" fmla="*/ 0 w 719364"/>
+              <a:gd name="csY0" fmla="*/ 0 h 554857"/>
+              <a:gd name="csX1" fmla="*/ 719364 w 719364"/>
+              <a:gd name="csY1" fmla="*/ 0 h 554857"/>
+              <a:gd name="csX2" fmla="*/ 711646 w 719364"/>
+              <a:gd name="csY2" fmla="*/ 235034 h 554857"/>
+              <a:gd name="csX3" fmla="*/ 711646 w 719364"/>
+              <a:gd name="csY3" fmla="*/ 424010 h 554857"/>
+              <a:gd name="csX4" fmla="*/ 719364 w 719364"/>
+              <a:gd name="csY4" fmla="*/ 554857 h 554857"/>
+              <a:gd name="csX5" fmla="*/ 0 w 719364"/>
+              <a:gd name="csY5" fmla="*/ 554857 h 554857"/>
+              <a:gd name="csX6" fmla="*/ 0 w 719364"/>
+              <a:gd name="csY6" fmla="*/ 0 h 554857"/>
+              <a:gd name="csX0" fmla="*/ 0 w 719364"/>
+              <a:gd name="csY0" fmla="*/ 0 h 554857"/>
+              <a:gd name="csX1" fmla="*/ 591348 w 719364"/>
+              <a:gd name="csY1" fmla="*/ 12192 h 554857"/>
+              <a:gd name="csX2" fmla="*/ 711646 w 719364"/>
+              <a:gd name="csY2" fmla="*/ 235034 h 554857"/>
+              <a:gd name="csX3" fmla="*/ 711646 w 719364"/>
+              <a:gd name="csY3" fmla="*/ 424010 h 554857"/>
+              <a:gd name="csX4" fmla="*/ 719364 w 719364"/>
+              <a:gd name="csY4" fmla="*/ 554857 h 554857"/>
+              <a:gd name="csX5" fmla="*/ 0 w 719364"/>
+              <a:gd name="csY5" fmla="*/ 554857 h 554857"/>
+              <a:gd name="csX6" fmla="*/ 0 w 719364"/>
+              <a:gd name="csY6" fmla="*/ 0 h 554857"/>
+              <a:gd name="csX0" fmla="*/ 0 w 711646"/>
+              <a:gd name="csY0" fmla="*/ 0 h 560953"/>
+              <a:gd name="csX1" fmla="*/ 591348 w 711646"/>
+              <a:gd name="csY1" fmla="*/ 12192 h 560953"/>
+              <a:gd name="csX2" fmla="*/ 711646 w 711646"/>
+              <a:gd name="csY2" fmla="*/ 235034 h 560953"/>
+              <a:gd name="csX3" fmla="*/ 711646 w 711646"/>
+              <a:gd name="csY3" fmla="*/ 424010 h 560953"/>
+              <a:gd name="csX4" fmla="*/ 566964 w 711646"/>
+              <a:gd name="csY4" fmla="*/ 560953 h 560953"/>
+              <a:gd name="csX5" fmla="*/ 0 w 711646"/>
+              <a:gd name="csY5" fmla="*/ 554857 h 560953"/>
+              <a:gd name="csX6" fmla="*/ 0 w 711646"/>
+              <a:gd name="csY6" fmla="*/ 0 h 560953"/>
+            </a:gdLst>
+            <a:ahLst/>
+            <a:cxnLst>
+              <a:cxn ang="0">
+                <a:pos x="csX0" y="csY0"/>
+              </a:cxn>
+              <a:cxn ang="0">
+                <a:pos x="csX1" y="csY1"/>
+              </a:cxn>
+              <a:cxn ang="0">
+                <a:pos x="csX2" y="csY2"/>
+              </a:cxn>
+              <a:cxn ang="0">
+                <a:pos x="csX3" y="csY3"/>
+              </a:cxn>
+              <a:cxn ang="0">
+                <a:pos x="csX4" y="csY4"/>
+              </a:cxn>
+              <a:cxn ang="0">
+                <a:pos x="csX5" y="csY5"/>
+              </a:cxn>
+              <a:cxn ang="0">
+                <a:pos x="csX6" y="csY6"/>
+              </a:cxn>
+            </a:cxnLst>
+            <a:rect l="l" t="t" r="r" b="b"/>
+            <a:pathLst>
+              <a:path w="711646" h="560953">
+                <a:moveTo>
+                  <a:pt x="0" y="0"/>
+                </a:moveTo>
+                <a:lnTo>
+                  <a:pt x="591348" y="12192"/>
+                </a:lnTo>
+                <a:lnTo>
+                  <a:pt x="711646" y="235034"/>
+                </a:lnTo>
+                <a:lnTo>
+                  <a:pt x="711646" y="424010"/>
+                </a:lnTo>
+                <a:lnTo>
+                  <a:pt x="566964" y="560953"/>
+                </a:lnTo>
+                <a:lnTo>
+                  <a:pt x="0" y="554857"/>
+                </a:lnTo>
+                <a:lnTo>
+                  <a:pt x="0" y="0"/>
+                </a:lnTo>
+                <a:close/>
+              </a:path>
+            </a:pathLst>
+          </a:custGeom>
+        </p:spPr>
+        <p:style>
+          <a:lnRef idx="2">
+            <a:schemeClr val="accent1">
+              <a:shade val="15000"/>
+            </a:schemeClr>
+          </a:lnRef>
+          <a:fillRef idx="1">
+            <a:schemeClr val="accent1"/>
+          </a:fillRef>
+          <a:effectRef idx="0">
+            <a:schemeClr val="accent1"/>
+          </a:effectRef>
+          <a:fontRef idx="minor">
+            <a:schemeClr val="lt1"/>
+          </a:fontRef>
+        </p:style>
+        <p:txBody>
+          <a:bodyPr rtlCol="1" anchor="ctr"/>
+          <a:lstStyle/>
+          <a:p>
+            <a:pPr algn="ctr" rtl="0"/>
+            <a:r>
+              <a:rPr lang="he-IL" sz="1200" dirty="0" err="1"/>
+              <a:t>אישתי</a:t>
+            </a:r>
+            <a:endParaRPr lang="he-IL" sz="1200" dirty="0"/>
+          </a:p>
+        </p:txBody>
+      </p:sp>
+      <p:sp>
+        <p:nvSpPr>
+          <p:cNvPr id="46" name="מלבן 41">
+            <a:extLst>
+              <a:ext uri="{FF2B5EF4-FFF2-40B4-BE49-F238E27FC236}">
+                <a16:creationId xmlns:a16="http://schemas.microsoft.com/office/drawing/2014/main" id="{4422442D-AC39-0EB6-DA12-4D30BC671152}"/>
+              </a:ext>
+            </a:extLst>
+          </p:cNvPr>
+          <p:cNvSpPr/>
+          <p:nvPr/>
+        </p:nvSpPr>
+        <p:spPr>
+          <a:xfrm>
+            <a:off x="3427538" y="5346052"/>
+            <a:ext cx="711646" cy="560953"/>
+          </a:xfrm>
+          <a:custGeom>
+            <a:avLst/>
+            <a:gdLst>
+              <a:gd name="csX0" fmla="*/ 0 w 719364"/>
+              <a:gd name="csY0" fmla="*/ 0 h 554857"/>
+              <a:gd name="csX1" fmla="*/ 719364 w 719364"/>
+              <a:gd name="csY1" fmla="*/ 0 h 554857"/>
+              <a:gd name="csX2" fmla="*/ 719364 w 719364"/>
+              <a:gd name="csY2" fmla="*/ 554857 h 554857"/>
+              <a:gd name="csX3" fmla="*/ 0 w 719364"/>
+              <a:gd name="csY3" fmla="*/ 554857 h 554857"/>
+              <a:gd name="csX4" fmla="*/ 0 w 719364"/>
+              <a:gd name="csY4" fmla="*/ 0 h 554857"/>
+              <a:gd name="csX0" fmla="*/ 0 w 719364"/>
+              <a:gd name="csY0" fmla="*/ 0 h 554857"/>
+              <a:gd name="csX1" fmla="*/ 719364 w 719364"/>
+              <a:gd name="csY1" fmla="*/ 0 h 554857"/>
+              <a:gd name="csX2" fmla="*/ 711646 w 719364"/>
+              <a:gd name="csY2" fmla="*/ 235034 h 554857"/>
+              <a:gd name="csX3" fmla="*/ 719364 w 719364"/>
+              <a:gd name="csY3" fmla="*/ 554857 h 554857"/>
+              <a:gd name="csX4" fmla="*/ 0 w 719364"/>
+              <a:gd name="csY4" fmla="*/ 554857 h 554857"/>
+              <a:gd name="csX5" fmla="*/ 0 w 719364"/>
+              <a:gd name="csY5" fmla="*/ 0 h 554857"/>
+              <a:gd name="csX0" fmla="*/ 0 w 719364"/>
+              <a:gd name="csY0" fmla="*/ 0 h 554857"/>
+              <a:gd name="csX1" fmla="*/ 719364 w 719364"/>
+              <a:gd name="csY1" fmla="*/ 0 h 554857"/>
+              <a:gd name="csX2" fmla="*/ 711646 w 719364"/>
+              <a:gd name="csY2" fmla="*/ 235034 h 554857"/>
+              <a:gd name="csX3" fmla="*/ 711646 w 719364"/>
+              <a:gd name="csY3" fmla="*/ 424010 h 554857"/>
+              <a:gd name="csX4" fmla="*/ 719364 w 719364"/>
+              <a:gd name="csY4" fmla="*/ 554857 h 554857"/>
+              <a:gd name="csX5" fmla="*/ 0 w 719364"/>
+              <a:gd name="csY5" fmla="*/ 554857 h 554857"/>
+              <a:gd name="csX6" fmla="*/ 0 w 719364"/>
+              <a:gd name="csY6" fmla="*/ 0 h 554857"/>
+              <a:gd name="csX0" fmla="*/ 0 w 719364"/>
+              <a:gd name="csY0" fmla="*/ 0 h 554857"/>
+              <a:gd name="csX1" fmla="*/ 591348 w 719364"/>
+              <a:gd name="csY1" fmla="*/ 12192 h 554857"/>
+              <a:gd name="csX2" fmla="*/ 711646 w 719364"/>
+              <a:gd name="csY2" fmla="*/ 235034 h 554857"/>
+              <a:gd name="csX3" fmla="*/ 711646 w 719364"/>
+              <a:gd name="csY3" fmla="*/ 424010 h 554857"/>
+              <a:gd name="csX4" fmla="*/ 719364 w 719364"/>
+              <a:gd name="csY4" fmla="*/ 554857 h 554857"/>
+              <a:gd name="csX5" fmla="*/ 0 w 719364"/>
+              <a:gd name="csY5" fmla="*/ 554857 h 554857"/>
+              <a:gd name="csX6" fmla="*/ 0 w 719364"/>
+              <a:gd name="csY6" fmla="*/ 0 h 554857"/>
+              <a:gd name="csX0" fmla="*/ 0 w 711646"/>
+              <a:gd name="csY0" fmla="*/ 0 h 560953"/>
+              <a:gd name="csX1" fmla="*/ 591348 w 711646"/>
+              <a:gd name="csY1" fmla="*/ 12192 h 560953"/>
+              <a:gd name="csX2" fmla="*/ 711646 w 711646"/>
+              <a:gd name="csY2" fmla="*/ 235034 h 560953"/>
+              <a:gd name="csX3" fmla="*/ 711646 w 711646"/>
+              <a:gd name="csY3" fmla="*/ 424010 h 560953"/>
+              <a:gd name="csX4" fmla="*/ 566964 w 711646"/>
+              <a:gd name="csY4" fmla="*/ 560953 h 560953"/>
+              <a:gd name="csX5" fmla="*/ 0 w 711646"/>
+              <a:gd name="csY5" fmla="*/ 554857 h 560953"/>
+              <a:gd name="csX6" fmla="*/ 0 w 711646"/>
+              <a:gd name="csY6" fmla="*/ 0 h 560953"/>
+            </a:gdLst>
+            <a:ahLst/>
+            <a:cxnLst>
+              <a:cxn ang="0">
+                <a:pos x="csX0" y="csY0"/>
+              </a:cxn>
+              <a:cxn ang="0">
+                <a:pos x="csX1" y="csY1"/>
+              </a:cxn>
+              <a:cxn ang="0">
+                <a:pos x="csX2" y="csY2"/>
+              </a:cxn>
+              <a:cxn ang="0">
+                <a:pos x="csX3" y="csY3"/>
+              </a:cxn>
+              <a:cxn ang="0">
+                <a:pos x="csX4" y="csY4"/>
+              </a:cxn>
+              <a:cxn ang="0">
+                <a:pos x="csX5" y="csY5"/>
+              </a:cxn>
+              <a:cxn ang="0">
+                <a:pos x="csX6" y="csY6"/>
+              </a:cxn>
+            </a:cxnLst>
+            <a:rect l="l" t="t" r="r" b="b"/>
+            <a:pathLst>
+              <a:path w="711646" h="560953">
+                <a:moveTo>
+                  <a:pt x="0" y="0"/>
+                </a:moveTo>
+                <a:lnTo>
+                  <a:pt x="591348" y="12192"/>
+                </a:lnTo>
+                <a:lnTo>
+                  <a:pt x="711646" y="235034"/>
+                </a:lnTo>
+                <a:lnTo>
+                  <a:pt x="711646" y="424010"/>
+                </a:lnTo>
+                <a:lnTo>
+                  <a:pt x="566964" y="560953"/>
+                </a:lnTo>
+                <a:lnTo>
+                  <a:pt x="0" y="554857"/>
+                </a:lnTo>
+                <a:lnTo>
+                  <a:pt x="0" y="0"/>
+                </a:lnTo>
+                <a:close/>
+              </a:path>
+            </a:pathLst>
+          </a:custGeom>
+        </p:spPr>
+        <p:style>
+          <a:lnRef idx="2">
+            <a:schemeClr val="accent1">
+              <a:shade val="15000"/>
+            </a:schemeClr>
+          </a:lnRef>
+          <a:fillRef idx="1">
+            <a:schemeClr val="accent1"/>
+          </a:fillRef>
+          <a:effectRef idx="0">
+            <a:schemeClr val="accent1"/>
+          </a:effectRef>
+          <a:fontRef idx="minor">
+            <a:schemeClr val="lt1"/>
+          </a:fontRef>
+        </p:style>
+        <p:txBody>
+          <a:bodyPr rtlCol="1" anchor="ctr"/>
+          <a:lstStyle/>
+          <a:p>
+            <a:pPr algn="ctr" rtl="0"/>
+            <a:r>
+              <a:rPr lang="he-IL" sz="1200" dirty="0"/>
+              <a:t>+</a:t>
+            </a:r>
+          </a:p>
+        </p:txBody>
+      </p:sp>
+    </p:spTree>
+    <p:extLst>
+      <p:ext uri="{BB962C8B-B14F-4D97-AF65-F5344CB8AC3E}">
+        <p14:creationId xmlns:p14="http://schemas.microsoft.com/office/powerpoint/2010/main" val="2395382413"/>
       </p:ext>
     </p:extLst>
   </p:cSld>
